--- a/slides/lrec_demo.pptx
+++ b/slides/lrec_demo.pptx
@@ -3309,8 +3309,10 @@
               <a:t> </a:t>
             </a:r>
             <a:r>
-              <a:rPr i="1"/>
-              <a:t>Zenodo DOI: pending</a:t>
+              <a:rPr>
+                <a:hlinkClick r:id="rId3"/>
+              </a:rPr>
+              <a:t>10.5281/zenodo.20439182</a:t>
             </a:r>
           </a:p>
         </p:txBody>
@@ -4514,7 +4516,17 @@
             <a:pPr lvl="0"/>
             <a:r>
               <a:rPr/>
-              <a:t>Dataset: Zenodo DOI: pending (CC-BY-4.0)</a:t>
+              <a:t>Dataset: </a:t>
+            </a:r>
+            <a:r>
+              <a:rPr>
+                <a:hlinkClick r:id="rId2"/>
+              </a:rPr>
+              <a:t>10.5281/zenodo.20439182</a:t>
+            </a:r>
+            <a:r>
+              <a:rPr/>
+              <a:t> (CC-BY-4.0)</a:t>
             </a:r>
           </a:p>
           <a:p>

--- a/slides/lrec_demo.pptx
+++ b/slides/lrec_demo.pptx
@@ -3124,7 +3124,7 @@
             </a:pPr>
             <a:r>
               <a:rPr/>
-              <a:t>AthDGC — system demonstration</a:t>
+              <a:t>AthDGC - system demonstration</a:t>
             </a:r>
           </a:p>
         </p:txBody>
@@ -3384,7 +3384,7 @@
             </a:pPr>
             <a:r>
               <a:rPr/>
-              <a:t>Open PROIEL-style dependency treebank — Homer to Modern Greek — with NT verse-level cross-alignment to Latin / Gothic / Old Church Slavonic.</a:t>
+              <a:t>Open PROIEL-style dependency treebank - Homer to Modern Greek - with NT verse-level cross-alignment to Latin / Gothic / Old Church Slavonic.</a:t>
             </a:r>
           </a:p>
           <a:p>
@@ -3469,7 +3469,7 @@
             </a:r>
             <a:r>
               <a:rPr/>
-              <a:t> — Overview + funding context</a:t>
+              <a:t> - Overview + funding context</a:t>
             </a:r>
           </a:p>
           <a:p>
@@ -3482,7 +3482,7 @@
             </a:r>
             <a:r>
               <a:rPr/>
-              <a:t> — Live browse of the showcase: PROIEL tree + arg-structure cards</a:t>
+              <a:t> - Live browse of the showcase: PROIEL tree + arg-structure cards</a:t>
             </a:r>
           </a:p>
           <a:p>
@@ -3495,7 +3495,7 @@
             </a:r>
             <a:r>
               <a:rPr/>
-              <a:t> — Live cross-alignment query (Neo4j) across Greek/Latin/Gothic</a:t>
+              <a:t> - Live cross-alignment query (Neo4j) across Greek/Latin/Gothic</a:t>
             </a:r>
           </a:p>
           <a:p>
@@ -3508,7 +3508,7 @@
             </a:r>
             <a:r>
               <a:rPr/>
-              <a:t> — Editor workflow: flag-for-review toolbar + corpus-side fix pipeline</a:t>
+              <a:t> - Editor workflow: flag-for-review toolbar + corpus-side fix pipeline</a:t>
             </a:r>
           </a:p>
           <a:p>
@@ -3521,7 +3521,7 @@
             </a:r>
             <a:r>
               <a:rPr/>
-              <a:t> — Q&amp;A</a:t>
+              <a:t> - Q&amp;A</a:t>
             </a:r>
           </a:p>
         </p:txBody>
@@ -3568,7 +3568,7 @@
             </a:pPr>
             <a:r>
               <a:rPr/>
-              <a:t>Live demo step 1 — browse</a:t>
+              <a:t>Live demo step 1 - browse</a:t>
             </a:r>
           </a:p>
         </p:txBody>
@@ -3731,7 +3731,7 @@
             </a:pPr>
             <a:r>
               <a:rPr/>
-              <a:t>Live demo step 2 — cross-alignment</a:t>
+              <a:t>Live demo step 2 - cross-alignment</a:t>
             </a:r>
           </a:p>
         </p:txBody>
@@ -3835,7 +3835,7 @@
             </a:pPr>
             <a:r>
               <a:rPr/>
-              <a:t>Live demo step 3 — editor workflow</a:t>
+              <a:t>Live demo step 3 - editor workflow</a:t>
             </a:r>
           </a:p>
         </p:txBody>
@@ -4071,7 +4071,7 @@
                       </a:r>
                       <a:r>
                         <a:rPr/>
-                        <a:t> — daily cron on ARIS</a:t>
+                        <a:t> - daily cron on ARIS</a:t>
                       </a:r>
                     </a:p>
                   </a:txBody>
@@ -4109,7 +4109,7 @@
                       </a:r>
                       <a:r>
                         <a:rPr/>
-                        <a:t> — Greek-script + apparatus filters</a:t>
+                        <a:t> - Greek-script + apparatus filters</a:t>
                       </a:r>
                     </a:p>
                   </a:txBody>
@@ -4191,7 +4191,7 @@
                       </a:r>
                       <a:r>
                         <a:rPr/>
-                        <a:t> — Stanza on A100 GPU</a:t>
+                        <a:t> - Stanza on A100 GPU</a:t>
                       </a:r>
                     </a:p>
                   </a:txBody>
@@ -4229,7 +4229,7 @@
                       </a:r>
                       <a:r>
                         <a:rPr/>
-                        <a:t> — JSONL partitioning</a:t>
+                        <a:t> - JSONL partitioning</a:t>
                       </a:r>
                     </a:p>
                   </a:txBody>
@@ -4267,7 +4267,7 @@
                       </a:r>
                       <a:r>
                         <a:rPr/>
-                        <a:t> — TLG author override + Stanza error fixes</a:t>
+                        <a:t> - TLG author override + Stanza error fixes</a:t>
                       </a:r>
                     </a:p>
                   </a:txBody>
@@ -4305,7 +4305,7 @@
                       </a:r>
                       <a:r>
                         <a:rPr/>
-                        <a:t> — regenerates HTML from JSONL</a:t>
+                        <a:t> - regenerates HTML from JSONL</a:t>
                       </a:r>
                     </a:p>
                   </a:txBody>
@@ -4343,7 +4343,7 @@
                       </a:r>
                       <a:r>
                         <a:rPr/>
-                        <a:t> — scp + git push</a:t>
+                        <a:t> - scp + git push</a:t>
                       </a:r>
                     </a:p>
                   </a:txBody>

--- a/slides/lrec_demo.pptx
+++ b/slides/lrec_demo.pptx
@@ -15,6 +15,7 @@
     <p:sldId id="263" r:id="rId9"/>
     <p:sldId id="264" r:id="rId10"/>
     <p:sldId id="265" r:id="rId11"/>
+    <p:sldId id="266" r:id="rId12"/>
   </p:sldIdLst>
   <p:sldSz cx="9144000" cy="5143500" type="screen16x9"/>
   <p:notesSz cx="6858000" cy="9144000"/>
@@ -3313,6 +3314,120 @@
                 <a:hlinkClick r:id="rId3"/>
               </a:rPr>
               <a:t>10.5281/zenodo.20439182</a:t>
+            </a:r>
+          </a:p>
+        </p:txBody>
+      </p:sp>
+    </p:spTree>
+  </p:cSld>
+</p:sld>
+</file>
+
+<file path=ppt/slides/slide11.xml><?xml version="1.0" encoding="utf-8"?>
+<p:sld xmlns:a="http://schemas.openxmlformats.org/drawingml/2006/main" xmlns:r="http://schemas.openxmlformats.org/officeDocument/2006/relationships" xmlns:p="http://schemas.openxmlformats.org/presentationml/2006/main">
+  <p:cSld>
+    <p:spTree>
+      <p:nvGrpSpPr>
+        <p:cNvPr id="1" name=""/>
+        <p:cNvGrpSpPr/>
+        <p:nvPr/>
+      </p:nvGrpSpPr>
+      <p:grpSpPr>
+        <a:xfrm>
+          <a:off x="0" y="0"/>
+          <a:ext cx="0" cy="0"/>
+          <a:chOff x="0" y="0"/>
+          <a:chExt cx="0" cy="0"/>
+        </a:xfrm>
+      </p:grpSpPr>
+      <p:sp>
+        <p:nvSpPr>
+          <p:cNvPr id="2" name="Title 1"/>
+          <p:cNvSpPr>
+            <a:spLocks noGrp="1"/>
+          </p:cNvSpPr>
+          <p:nvPr>
+            <p:ph type="title"/>
+          </p:nvPr>
+        </p:nvSpPr>
+        <p:spPr/>
+        <p:txBody>
+          <a:bodyPr/>
+          <a:lstStyle/>
+          <a:p>
+            <a:pPr lvl="0" indent="0" marL="0">
+              <a:buNone/>
+            </a:pPr>
+            <a:r>
+              <a:rPr/>
+              <a:t>Funding</a:t>
+            </a:r>
+          </a:p>
+        </p:txBody>
+      </p:sp>
+      <p:sp>
+        <p:nvSpPr>
+          <p:cNvPr id="3" name="Content Placeholder 2"/>
+          <p:cNvSpPr>
+            <a:spLocks noGrp="1"/>
+          </p:cNvSpPr>
+          <p:nvPr>
+            <p:ph idx="1"/>
+          </p:nvPr>
+        </p:nvSpPr>
+        <p:spPr/>
+        <p:txBody>
+          <a:bodyPr/>
+          <a:lstStyle/>
+          <a:p>
+            <a:pPr lvl="0" indent="0" marL="0">
+              <a:buNone/>
+            </a:pPr>
+            <a:r>
+              <a:rPr/>
+              <a:t>Funded by the </a:t>
+            </a:r>
+            <a:r>
+              <a:rPr b="1"/>
+              <a:t>Hellenic Foundation for Research and Innovation (HFRI)</a:t>
+            </a:r>
+            <a:r>
+              <a:rPr/>
+              <a:t> under the 3rd Call for HFRI Research Projects to support Post-Doctoral Researchers, </a:t>
+            </a:r>
+            <a:r>
+              <a:rPr b="1"/>
+              <a:t>Project No. 20577</a:t>
+            </a:r>
+            <a:r>
+              <a:rPr/>
+              <a:t>; with complementary support from the </a:t>
+            </a:r>
+            <a:r>
+              <a:rPr b="1"/>
+              <a:t>Greece 2.0 National Recovery and Resilience Plan</a:t>
+            </a:r>
+            <a:r>
+              <a:rPr/>
+              <a:t>. Compute supplied by </a:t>
+            </a:r>
+            <a:r>
+              <a:rPr b="1"/>
+              <a:t>GRNET ARIS</a:t>
+            </a:r>
+            <a:r>
+              <a:rPr/>
+              <a:t> (Greek national HPC), allocation </a:t>
+            </a:r>
+            <a:r>
+              <a:rPr>
+                <a:latin typeface="Courier"/>
+              </a:rPr>
+              <a:t>pa260305</a:t>
+            </a:r>
+            <a:r>
+              <a:rPr/>
+              <a:t>.</a:t>
             </a:r>
           </a:p>
         </p:txBody>

--- a/slides/lrec_demo.pptx
+++ b/slides/lrec_demo.pptx
@@ -4650,7 +4650,7 @@
             </a:pPr>
             <a:r>
               <a:rPr/>
-              <a:t>Lavidas, N. and the Athens Digital Glossa Chronos Research Network (2026). </a:t>
+              <a:t>Lavidas, N., Nikiforidou, K., Haug, D., Kulikov, L., Geka, V., Symeonidis, V., Michalareas, T., Chionidi, S., Tsiropina, A., Plakoutsi, E., and Argyropoulos, E. (2026). </a:t>
             </a:r>
             <a:r>
               <a:rPr i="1"/>

--- a/slides/lrec_demo.pptx
+++ b/slides/lrec_demo.pptx
@@ -4650,7 +4650,7 @@
             </a:pPr>
             <a:r>
               <a:rPr/>
-              <a:t>Lavidas, N., Nikiforidou, K., Haug, D., Kulikov, L., Geka, V., Symeonidis, V., Michalareas, T., Chionidi, S., Tsiropina, A., Plakoutsi, E., and Argyropoulos, E. (2026). </a:t>
+              <a:t>Lavidas, N., Nikiforidou, K., Haug, D., Kulikov, L., Geka, V., Symeonidis, V., Michalareas, T., Chionidi, S., Tsiropina, A., Plakoutsi, E., Argyropoulos, E., and the Athens Digital Glossa Chronos Research Network (2026). </a:t>
             </a:r>
             <a:r>
               <a:rPr i="1"/>

--- a/slides/lrec_demo.pptx
+++ b/slides/lrec_demo.pptx
@@ -3278,7 +3278,7 @@
             </a:r>
             <a:r>
               <a:rPr b="1"/>
-              <a:t>GRNET ARIS</a:t>
+              <a:t>GRNET ARIS (the Greek national high-performance computing cluster, run by GRNET)</a:t>
             </a:r>
             <a:r>
               <a:rPr/>
@@ -3417,7 +3417,7 @@
             </a:r>
             <a:r>
               <a:rPr/>
-              <a:t> (Greek national HPC), allocation </a:t>
+              <a:t> (Greek national HPC (high-performance computing, i.e. a cluster of fast machines used for heavy computation)), allocation </a:t>
             </a:r>
             <a:r>
               <a:rPr>
@@ -3499,7 +3499,7 @@
             </a:pPr>
             <a:r>
               <a:rPr/>
-              <a:t>Open PROIEL-style dependency treebank - Homer to Modern Greek - with NT verse-level cross-alignment to Latin / Gothic / Old Church Slavonic.</a:t>
+              <a:t>Open PROIEL (the dependency-treebank (a collection of sentences whose grammatical structure has been analysed and stored) standard for early Indo-European languages, developed at Oslo)-style dependency treebank - Homer to Modern Greek - with NT verse-level cross-alignment to Latin / Gothic / Old Church Slavonic.</a:t>
             </a:r>
           </a:p>
           <a:p>
@@ -3610,7 +3610,7 @@
             </a:r>
             <a:r>
               <a:rPr/>
-              <a:t> - Live cross-alignment query (Neo4j) across Greek/Latin/Gothic</a:t>
+              <a:t> - Live cross-alignment query (Neo4j (a graph database that stores data as nodes and connections rather than as tables)) across Greek/Latin/Gothic</a:t>
             </a:r>
           </a:p>
           <a:p>
@@ -4034,7 +4034,7 @@
             </a:pPr>
             <a:r>
               <a:rPr/>
-              <a:t>This JSON is then handed to the corpus-side </a:t>
+              <a:t>This JSON (a plain-text data format for structured records) is then handed to the corpus-side </a:t>
             </a:r>
             <a:r>
               <a:rPr>
@@ -4241,7 +4241,7 @@
                       </a:pPr>
                       <a:r>
                         <a:rPr/>
-                        <a:t>OCR / Conversion</a:t>
+                        <a:t>OCR (Optical Character Recognition, the conversion of scanned page images into searchable text) / Conversion</a:t>
                       </a:r>
                     </a:p>
                   </a:txBody>
@@ -4306,7 +4306,7 @@
                       </a:r>
                       <a:r>
                         <a:rPr/>
-                        <a:t> - Stanza on A100 GPU</a:t>
+                        <a:t> - Stanza (Stanford’s open-source Python pipeline that automatically tags, lemmatises, and parses sentences) on A100 GPU</a:t>
                       </a:r>
                     </a:p>
                   </a:txBody>
@@ -4344,7 +4344,7 @@
                       </a:r>
                       <a:r>
                         <a:rPr/>
-                        <a:t> - JSONL partitioning</a:t>
+                        <a:t> - JSONL (a plain-text data format that stores one record per line) partitioning</a:t>
                       </a:r>
                     </a:p>
                   </a:txBody>
@@ -4540,21 +4540,21 @@
             <a:pPr lvl="0"/>
             <a:r>
               <a:rPr/>
-              <a:t>PROIEL XML 2.0 export compatible with Oslo PROIEL tools</a:t>
+              <a:t>PROIEL XML 2.0 (the file format that stores each sentence as a tree of word-by-word grammatical relations, developed at Oslo) export compatible with Oslo PROIEL tools</a:t>
             </a:r>
           </a:p>
           <a:p>
             <a:pPr lvl="0"/>
             <a:r>
               <a:rPr/>
-              <a:t>Neo4j alignment graph for cross-linguistic queries</a:t>
+              <a:t>Neo4j alignment graph (a database that records which token in language A corresponds to which token in language B) for cross-linguistic queries</a:t>
             </a:r>
           </a:p>
           <a:p>
             <a:pPr lvl="0"/>
             <a:r>
               <a:rPr/>
-              <a:t>Public Hugging Face dataset (forthcoming)</a:t>
+              <a:t>Public Hugging Face (a public hosting platform for machine-learning models and datasets) dataset (forthcoming)</a:t>
             </a:r>
           </a:p>
         </p:txBody>
@@ -4624,7 +4624,7 @@
             <a:pPr lvl="0"/>
             <a:r>
               <a:rPr/>
-              <a:t>Source code: github.com/AthDGC/Diachronic-Linguistics-Platform (Apache-2.0)</a:t>
+              <a:t>Source code: github.com/AthDGC/Diachronic-Linguistics-Platform (Apache-2.0 (a permissive open-source licence widely used for software))</a:t>
             </a:r>
           </a:p>
           <a:p>
@@ -4637,11 +4637,11 @@
               <a:rPr>
                 <a:hlinkClick r:id="rId2"/>
               </a:rPr>
-              <a:t>10.5281/zenodo.20439182</a:t>
-            </a:r>
-            <a:r>
-              <a:rPr/>
-              <a:t> (CC-BY-4.0)</a:t>
+              <a:t>10.5281/zenodo (an open research-data repository hosted at CERN that mints permanent DOIs).20439182</a:t>
+            </a:r>
+            <a:r>
+              <a:rPr/>
+              <a:t> (CC-BY-4.0 (the Creative Commons Attribution 4.0 licence, which permits reuse with credit))</a:t>
             </a:r>
           </a:p>
           <a:p>

--- a/slides/lrec_demo.pptx
+++ b/slides/lrec_demo.pptx
@@ -4650,7 +4650,7 @@
             </a:pPr>
             <a:r>
               <a:rPr/>
-              <a:t>Lavidas, N., Nikiforidou, K., Haug, D., Kulikov, L., Geka, V., Symeonidis, V., Michalareas, T., Chionidi, S., Tsiropina, A., Plakoutsi, E., Argyropoulos, E., and the Athens Digital Glossa Chronos Research Network (2026). </a:t>
+              <a:t>Lavidas, N., Nikiforidou, K., Haug, D., Kulikov, L., Geka, V., Symeonidis, V., Michalareas, T., Chionidi, S., Tsiropina, A., Plakoutsi, E., and Argyropoulos, E. (2026). </a:t>
             </a:r>
             <a:r>
               <a:rPr i="1"/>

--- a/slides/lrec_demo.pptx
+++ b/slides/lrec_demo.pptx
@@ -4654,7 +4654,7 @@
             </a:r>
             <a:r>
               <a:rPr i="1"/>
-              <a:t>AthDGC: Athens Diachronic Glossa Chronos</a:t>
+              <a:t>AthDGC: Athens Digital Glossa Chronos</a:t>
             </a:r>
             <a:r>
               <a:rPr/>

--- a/slides/lrec_demo.pptx
+++ b/slides/lrec_demo.pptx
@@ -3125,7 +3125,7 @@
             </a:pPr>
             <a:r>
               <a:rPr/>
-              <a:t>AthDGC - system demonstration</a:t>
+              <a:t>AthDGC, system demonstration</a:t>
             </a:r>
           </a:p>
         </p:txBody>
@@ -3499,7 +3499,7 @@
             </a:pPr>
             <a:r>
               <a:rPr/>
-              <a:t>Open PROIEL (the dependency-treebank (a collection of sentences whose grammatical structure has been analysed and stored) standard for early Indo-European languages, developed at Oslo)-style dependency treebank - Homer to Modern Greek - with NT verse-level cross-alignment to Latin / Gothic / Old Church Slavonic.</a:t>
+              <a:t>Open PROIEL (the dependency-treebank (a collection of sentences whose grammatical structure has been analysed and stored) standard for early Indo-European languages, developed at Oslo)-style dependency treebank, Homer to Modern Greek - with NT verse-level cross-alignment to Latin / Gothic / Old Church Slavonic.</a:t>
             </a:r>
           </a:p>
           <a:p>
@@ -3584,7 +3584,7 @@
             </a:r>
             <a:r>
               <a:rPr/>
-              <a:t> - Overview + funding context</a:t>
+              <a:t>, Overview + funding context</a:t>
             </a:r>
           </a:p>
           <a:p>
@@ -3597,7 +3597,7 @@
             </a:r>
             <a:r>
               <a:rPr/>
-              <a:t> - Live browse of the showcase: PROIEL tree + arg-structure cards</a:t>
+              <a:t>, Live browse of the showcase: PROIEL tree + arg-structure cards</a:t>
             </a:r>
           </a:p>
           <a:p>
@@ -3610,7 +3610,7 @@
             </a:r>
             <a:r>
               <a:rPr/>
-              <a:t> - Live cross-alignment query (Neo4j (a graph database that stores data as nodes and connections rather than as tables)) across Greek/Latin/Gothic</a:t>
+              <a:t>, Live cross-alignment query (Neo4j (a graph database that stores data as nodes and connections rather than as tables)) across Greek/Latin/Gothic</a:t>
             </a:r>
           </a:p>
           <a:p>
@@ -3623,7 +3623,7 @@
             </a:r>
             <a:r>
               <a:rPr/>
-              <a:t> - Editor workflow: flag-for-review toolbar + corpus-side fix pipeline</a:t>
+              <a:t>, Editor workflow: flag-for-review toolbar + corpus-side fix workflow</a:t>
             </a:r>
           </a:p>
           <a:p>
@@ -3636,7 +3636,7 @@
             </a:r>
             <a:r>
               <a:rPr/>
-              <a:t> - Q&amp;A</a:t>
+              <a:t>, Q&amp;A</a:t>
             </a:r>
           </a:p>
         </p:txBody>
@@ -3683,7 +3683,7 @@
             </a:pPr>
             <a:r>
               <a:rPr/>
-              <a:t>Live demo step 1 - browse</a:t>
+              <a:t>Live demo step 1, browse</a:t>
             </a:r>
           </a:p>
         </p:txBody>
@@ -3846,7 +3846,7 @@
             </a:pPr>
             <a:r>
               <a:rPr/>
-              <a:t>Live demo step 2 - cross-alignment</a:t>
+              <a:t>Live demo step 2, cross-alignment</a:t>
             </a:r>
           </a:p>
         </p:txBody>
@@ -3950,7 +3950,7 @@
             </a:pPr>
             <a:r>
               <a:rPr/>
-              <a:t>Live demo step 3 - editor workflow</a:t>
+              <a:t>Live demo step 3, editor workflow</a:t>
             </a:r>
           </a:p>
         </p:txBody>
@@ -4306,7 +4306,7 @@
                       </a:r>
                       <a:r>
                         <a:rPr/>
-                        <a:t> - Stanza (Stanford’s open-source Python pipeline that automatically tags, lemmatises, and parses sentences) on A100 GPU</a:t>
+                        <a:t> - Stanza (Stanford’s open-source Python workflow that automatically tags, lemmatises, and parses sentences) on A100 GPU</a:t>
                       </a:r>
                     </a:p>
                   </a:txBody>

--- a/slides/lrec_demo.pptx
+++ b/slides/lrec_demo.pptx
@@ -4637,7 +4637,7 @@
               <a:rPr>
                 <a:hlinkClick r:id="rId2"/>
               </a:rPr>
-              <a:t>10.5281/zenodo (an open research-data repository hosted at CERN that mints permanent DOIs).20439182</a:t>
+              <a:t>10.5281/zenodo.20439182</a:t>
             </a:r>
             <a:r>
               <a:rPr/>
